--- a/01 Elementi Razvoja Softvera/02 Prezentacije/PPTX/01_Zahtevi_backlog_i_Git.pptx
+++ b/01 Elementi Razvoja Softvera/02 Prezentacije/PPTX/01_Zahtevi_backlog_i_Git.pptx
@@ -9757,7 +9757,7 @@
                 <a:ea typeface="Aptos"/>
                 <a:cs typeface="Aptos"/>
               </a:rPr>
-              <a:t>Провера обухвата следљив процес, основну структуру репозиторијума и почетни backlog.</a:t>
+              <a:t>После Вежбе 2, недеља од 19.10: проблем, backlog и развојни ток у репозиторијуму.</a:t>
             </a:r>
           </a:p>
         </p:txBody>
@@ -9982,7 +9982,7 @@
                 <a:ea typeface="Aptos"/>
                 <a:cs typeface="Aptos"/>
               </a:rPr>
-              <a:t>заједнички репозиторијум и основни опис</a:t>
+              <a:t>README и приступ свих чланова тима</a:t>
             </a:r>
           </a:p>
         </p:txBody>
@@ -10151,7 +10151,7 @@
                 <a:ea typeface="Aptos"/>
                 <a:cs typeface="Aptos"/>
               </a:rPr>
-              <a:t>Почетни backlog</a:t>
+              <a:t>Backlog у Tapiz Boards</a:t>
             </a:r>
           </a:p>
         </p:txBody>
@@ -10207,7 +10207,7 @@
                 <a:ea typeface="Aptos"/>
                 <a:cs typeface="Aptos"/>
               </a:rPr>
-              <a:t>јасне ставке и приоритети</a:t>
+              <a:t>приоритети и критеријуми прихватања</a:t>
             </a:r>
           </a:p>
         </p:txBody>
@@ -10376,7 +10376,7 @@
                 <a:ea typeface="Aptos"/>
                 <a:cs typeface="Aptos"/>
               </a:rPr>
-              <a:t>Грана или PR</a:t>
+              <a:t>Pull request</a:t>
             </a:r>
           </a:p>
         </p:txBody>
@@ -10432,7 +10432,7 @@
                 <a:ea typeface="Aptos"/>
                 <a:cs typeface="Aptos"/>
               </a:rPr>
-              <a:t>ставка повезана са конкретним радом</a:t>
+              <a:t>преглед измена и образложени коментари</a:t>
             </a:r>
           </a:p>
         </p:txBody>
@@ -10601,7 +10601,7 @@
                 <a:ea typeface="Aptos"/>
                 <a:cs typeface="Aptos"/>
               </a:rPr>
-              <a:t>Докази провере</a:t>
+              <a:t>Договорени ток</a:t>
             </a:r>
           </a:p>
         </p:txBody>
@@ -10657,7 +10657,7 @@
                 <a:ea typeface="Aptos"/>
                 <a:cs typeface="Aptos"/>
               </a:rPr>
-              <a:t>тим уме да објасни шта је урађено</a:t>
+              <a:t>од Backlog до Done, кроз Review и QA</a:t>
             </a:r>
           </a:p>
         </p:txBody>

--- a/01 Elementi Razvoja Softvera/02 Prezentacije/PPTX/01_Zahtevi_backlog_i_Git.pptx
+++ b/01 Elementi Razvoja Softvera/02 Prezentacije/PPTX/01_Zahtevi_backlog_i_Git.pptx
@@ -14405,7 +14405,7 @@
         <p:spPr>
           <a:xfrm xmlns:a="http://schemas.openxmlformats.org/drawingml/2006/main">
             <a:off x="7517892" y="2999232"/>
-            <a:ext cx="1353312" cy="209855"/>
+            <a:ext cx="1353312" cy="271577"/>
           </a:xfrm>
           <a:prstGeom xmlns:a="http://schemas.openxmlformats.org/drawingml/2006/main" prst="rect">
             <a:avLst/>
@@ -14431,9 +14431,9 @@
               <a:buNone/>
             </a:pPr>
             <a:r>
-              <a:rPr sz="1275" b="1">
-                <a:solidFill>
-                  <a:srgbClr val="183B5B"/>
+              <a:rPr sz="1650" b="1">
+                <a:solidFill>
+                  <a:srgbClr val="19222C"/>
                 </a:solidFill>
                 <a:latin typeface="Aptos"/>
                 <a:ea typeface="Aptos"/>
